--- a/docs/CarTrends-User-Manual-v1.1.pptx
+++ b/docs/CarTrends-User-Manual-v1.1.pptx
@@ -6563,7 +6563,7 @@
                 <a:ea typeface="Calibri" pitchFamily="34" charset="-122"/>
                 <a:cs typeface="Calibri" pitchFamily="34" charset="-120"/>
               </a:rPr>
-              <a:t>Add users, set role (Admin / Manager / HR / Accounts / Support / Sales) and "Reports to". The reporting chain drives escalations and visibility.</a:t>
+              <a:t>Add users, set role (Admin / Sales Manager / Sales / Purchase / Accounts / IT Lead / Developer / HR) and "Reports to". The reporting chain drives escalations and visibility.</a:t>
             </a:r>
             <a:endParaRPr lang="en-US" sz="1100" dirty="0"/>
           </a:p>
